--- a/assets/pptx/catalog-476.pptx
+++ b/assets/pptx/catalog-476.pptx
@@ -3303,7 +3303,7 @@
                 <a:ea typeface="Ebrima"/>
                 <a:cs typeface="Ebrima"/>
               </a:rPr>
-              <a:t>የምታመንበት ሆነኝ እረዳቴ (2x)</a:t>
+              <a:t>የምታመንበት ሆነኝ እረዳቴ 2x</a:t>
             </a:r>
           </a:p>
         </p:txBody>
@@ -3545,7 +3545,7 @@
                 <a:ea typeface="Ebrima"/>
                 <a:cs typeface="Ebrima"/>
               </a:rPr>
-              <a:t>የምታመንበት ሆነኝ እረዳቴ (2x)</a:t>
+              <a:t>የምታመንበት ሆነኝ እረዳቴ 2x</a:t>
             </a:r>
           </a:p>
         </p:txBody>
@@ -3787,7 +3787,7 @@
                 <a:ea typeface="Ebrima"/>
                 <a:cs typeface="Ebrima"/>
               </a:rPr>
-              <a:t>የምታመንበት ሆነኝ እረዳቴ (2x)</a:t>
+              <a:t>የምታመንበት ሆነኝ እረዳቴ 2x</a:t>
             </a:r>
           </a:p>
         </p:txBody>
@@ -4029,7 +4029,7 @@
                 <a:ea typeface="Ebrima"/>
                 <a:cs typeface="Ebrima"/>
               </a:rPr>
-              <a:t>የምታመንበት ሆነኝ እረዳቴ (2x)</a:t>
+              <a:t>የምታመንበት ሆነኝ እረዳቴ 2x</a:t>
             </a:r>
           </a:p>
         </p:txBody>
@@ -4271,7 +4271,7 @@
                 <a:ea typeface="Ebrima"/>
                 <a:cs typeface="Ebrima"/>
               </a:rPr>
-              <a:t>የምታመንበት ሆነኝ እረዳቴ (2x)</a:t>
+              <a:t>የምታመንበት ሆነኝ እረዳቴ 2x</a:t>
             </a:r>
           </a:p>
         </p:txBody>
